--- a/Cours_7/Cours programmation WEB7.pptx
+++ b/Cours_7/Cours programmation WEB7.pptx
@@ -10,6 +10,8 @@
     <p:sldId id="258" r:id="rId4"/>
     <p:sldId id="259" r:id="rId5"/>
     <p:sldId id="260" r:id="rId6"/>
+    <p:sldId id="261" r:id="rId7"/>
+    <p:sldId id="262" r:id="rId8"/>
   </p:sldIdLst>
   <p:sldSz cx="12192000" cy="6858000"/>
   <p:notesSz cx="12192000" cy="6858000"/>
@@ -269,7 +271,7 @@
             </a:pPr>
             <a:fld id="{3C2B07E4-CDF9-4C88-A2F3-04620E58224D}" type="datetimeFigureOut">
               <a:rPr lang="en-US"/>
-              <a:t>12/3/2024</a:t>
+              <a:t>12/4/2024</a:t>
             </a:fld>
             <a:endParaRPr lang="en-US"/>
           </a:p>
@@ -546,7 +548,7 @@
             </a:pPr>
             <a:fld id="{3C2B07E4-CDF9-4C88-A2F3-04620E58224D}" type="datetimeFigureOut">
               <a:rPr lang="en-US"/>
-              <a:t>12/3/2024</a:t>
+              <a:t>12/4/2024</a:t>
             </a:fld>
             <a:endParaRPr lang="en-US"/>
           </a:p>
@@ -791,7 +793,7 @@
             </a:pPr>
             <a:fld id="{3C2B07E4-CDF9-4C88-A2F3-04620E58224D}" type="datetimeFigureOut">
               <a:rPr lang="en-US"/>
-              <a:t>12/3/2024</a:t>
+              <a:t>12/4/2024</a:t>
             </a:fld>
             <a:endParaRPr lang="en-US"/>
           </a:p>
@@ -1036,7 +1038,7 @@
             </a:pPr>
             <a:fld id="{3C2B07E4-CDF9-4C88-A2F3-04620E58224D}" type="datetimeFigureOut">
               <a:rPr lang="en-US"/>
-              <a:t>12/3/2024</a:t>
+              <a:t>12/4/2024</a:t>
             </a:fld>
             <a:endParaRPr lang="en-US"/>
           </a:p>
@@ -1342,7 +1344,7 @@
             </a:pPr>
             <a:fld id="{3C2B07E4-CDF9-4C88-A2F3-04620E58224D}" type="datetimeFigureOut">
               <a:rPr lang="en-US"/>
-              <a:t>12/3/2024</a:t>
+              <a:t>12/4/2024</a:t>
             </a:fld>
             <a:endParaRPr lang="en-US"/>
           </a:p>
@@ -1694,7 +1696,7 @@
             </a:pPr>
             <a:fld id="{3C2B07E4-CDF9-4C88-A2F3-04620E58224D}" type="datetimeFigureOut">
               <a:rPr lang="en-US"/>
-              <a:t>12/3/2024</a:t>
+              <a:t>12/4/2024</a:t>
             </a:fld>
             <a:endParaRPr lang="en-US"/>
           </a:p>
@@ -2202,7 +2204,7 @@
             </a:pPr>
             <a:fld id="{3C2B07E4-CDF9-4C88-A2F3-04620E58224D}" type="datetimeFigureOut">
               <a:rPr lang="en-US"/>
-              <a:t>12/3/2024</a:t>
+              <a:t>12/4/2024</a:t>
             </a:fld>
             <a:endParaRPr lang="en-US"/>
           </a:p>
@@ -2494,7 +2496,7 @@
             </a:pPr>
             <a:fld id="{3C2B07E4-CDF9-4C88-A2F3-04620E58224D}" type="datetimeFigureOut">
               <a:rPr lang="en-US"/>
-              <a:t>12/3/2024</a:t>
+              <a:t>12/4/2024</a:t>
             </a:fld>
             <a:endParaRPr lang="en-US"/>
           </a:p>
@@ -2593,7 +2595,7 @@
             </a:pPr>
             <a:fld id="{3C2B07E4-CDF9-4C88-A2F3-04620E58224D}" type="datetimeFigureOut">
               <a:rPr lang="en-US"/>
-              <a:t>12/3/2024</a:t>
+              <a:t>12/4/2024</a:t>
             </a:fld>
             <a:endParaRPr lang="en-US"/>
           </a:p>
@@ -2924,7 +2926,7 @@
             </a:pPr>
             <a:fld id="{3C2B07E4-CDF9-4C88-A2F3-04620E58224D}" type="datetimeFigureOut">
               <a:rPr lang="en-US"/>
-              <a:t>12/3/2024</a:t>
+              <a:t>12/4/2024</a:t>
             </a:fld>
             <a:endParaRPr lang="en-US"/>
           </a:p>
@@ -3202,7 +3204,7 @@
             </a:pPr>
             <a:fld id="{3C2B07E4-CDF9-4C88-A2F3-04620E58224D}" type="datetimeFigureOut">
               <a:rPr lang="en-US"/>
-              <a:t>12/3/2024</a:t>
+              <a:t>12/4/2024</a:t>
             </a:fld>
             <a:endParaRPr lang="en-US"/>
           </a:p>
@@ -3434,7 +3436,7 @@
             </a:pPr>
             <a:fld id="{3C2B07E4-CDF9-4C88-A2F3-04620E58224D}" type="datetimeFigureOut">
               <a:rPr lang="en-US"/>
-              <a:t>12/3/2024</a:t>
+              <a:t>12/4/2024</a:t>
             </a:fld>
             <a:endParaRPr lang="en-US"/>
           </a:p>
@@ -4530,8 +4532,8 @@
         </p:nvSpPr>
         <p:spPr bwMode="auto">
           <a:xfrm>
-            <a:off x="1095374" y="1547812"/>
-            <a:ext cx="10001250" cy="3399895"/>
+            <a:off x="902795" y="878889"/>
+            <a:ext cx="10386410" cy="5646198"/>
           </a:xfrm>
         </p:spPr>
         <p:txBody>
@@ -4550,16 +4552,70 @@
               <a:defRPr/>
             </a:pPr>
             <a:r>
-              <a:rPr lang="fr-FR" sz="2800" b="1" i="0" u="none" strike="noStrike" cap="all" spc="599">
+              <a:rPr lang="fr-FR" sz="2800" b="1" i="0" u="none" strike="noStrike" cap="all" spc="599" dirty="0">
                 <a:solidFill>
                   <a:schemeClr val="tx1"/>
                 </a:solidFill>
                 <a:latin typeface="Trade Gothic Next Cond"/>
                 <a:cs typeface="Trade Gothic Next Cond"/>
               </a:rPr>
-              <a:t>Flexbox (ou Flexible Box) est une technique de mise en page en CSS qui permet d’aligner, distribuer et organiser facilement les éléments d’un conteneur, même lorsque leurs tailles sont dynamiques ou inconnues.</a:t>
-            </a:r>
-            <a:endParaRPr/>
+              <a:t>RAPPEL:</a:t>
+            </a:r>
+            <a:br>
+              <a:rPr lang="fr-FR" sz="2800" b="1" i="0" u="none" strike="noStrike" cap="all" spc="599" dirty="0">
+                <a:solidFill>
+                  <a:schemeClr val="tx1"/>
+                </a:solidFill>
+                <a:latin typeface="Trade Gothic Next Cond"/>
+                <a:cs typeface="Trade Gothic Next Cond"/>
+              </a:rPr>
+            </a:br>
+            <a:r>
+              <a:rPr lang="fr-FR" sz="2800" b="1" i="0" u="none" strike="noStrike" cap="all" spc="599" dirty="0">
+                <a:solidFill>
+                  <a:schemeClr val="tx1"/>
+                </a:solidFill>
+                <a:latin typeface="Trade Gothic Next Cond"/>
+                <a:cs typeface="Trade Gothic Next Cond"/>
+              </a:rPr>
+              <a:t>• </a:t>
+            </a:r>
+            <a:r>
+              <a:rPr lang="fr-FR" dirty="0"/>
+              <a:t>Définition : </a:t>
+            </a:r>
+            <a:r>
+              <a:rPr lang="fr-FR" dirty="0" err="1"/>
+              <a:t>Flexbox</a:t>
+            </a:r>
+            <a:r>
+              <a:rPr lang="fr-FR" dirty="0"/>
+              <a:t> (Flexible Box) est une méthode de mise en page en CSS.</a:t>
+            </a:r>
+            <a:br>
+              <a:rPr lang="fr-FR" dirty="0"/>
+            </a:br>
+            <a:br>
+              <a:rPr lang="fr-FR" dirty="0"/>
+            </a:br>
+            <a:r>
+              <a:rPr lang="fr-FR" dirty="0"/>
+              <a:t>• Objectif : Faciliter l’alignement, la distribution et l’organisation des éléments dans un conteneur.</a:t>
+            </a:r>
+            <a:br>
+              <a:rPr lang="fr-FR" dirty="0"/>
+            </a:br>
+            <a:br>
+              <a:rPr lang="fr-FR" dirty="0"/>
+            </a:br>
+            <a:r>
+              <a:rPr lang="fr-FR" dirty="0"/>
+              <a:t>• Particularité : Fonctionne même avec des éléments de tailles dynamiques ou inconnues.</a:t>
+            </a:r>
+            <a:br>
+              <a:rPr lang="fr-FR" dirty="0"/>
+            </a:br>
+            <a:endParaRPr dirty="0"/>
           </a:p>
         </p:txBody>
       </p:sp>
@@ -4903,7 +4959,7 @@
         </p:spPr>
         <p:txBody>
           <a:bodyPr vertOverflow="overflow" horzOverflow="overflow" vert="horz" wrap="square" lIns="91440" tIns="45720" rIns="91440" bIns="45720" numCol="1" spcCol="0" rtlCol="0" fromWordArt="0" anchor="b" anchorCtr="0" forceAA="0" compatLnSpc="0">
-            <a:normAutofit/>
+            <a:normAutofit fontScale="90000"/>
           </a:bodyPr>
           <a:lstStyle/>
           <a:p>
@@ -4987,6 +5043,328 @@
   </p:cSld>
   <p:clrMapOvr>
     <a:overrideClrMapping bg1="lt1" tx1="dk1" bg2="lt2" tx2="dk2" accent1="accent1" accent2="accent2" accent3="accent3" accent4="accent4" accent5="accent5" accent6="accent6" hlink="hlink" folHlink="folHlink"/>
+  </p:clrMapOvr>
+</p:sld>
+</file>
+
+<file path=ppt/slides/slide6.xml><?xml version="1.0" encoding="utf-8"?>
+<p:sld xmlns:a="http://schemas.openxmlformats.org/drawingml/2006/main" xmlns:r="http://schemas.openxmlformats.org/officeDocument/2006/relationships" xmlns:p="http://schemas.openxmlformats.org/presentationml/2006/main">
+  <p:cSld>
+    <p:spTree>
+      <p:nvGrpSpPr>
+        <p:cNvPr id="1" name=""/>
+        <p:cNvGrpSpPr/>
+        <p:nvPr/>
+      </p:nvGrpSpPr>
+      <p:grpSpPr>
+        <a:xfrm>
+          <a:off x="0" y="0"/>
+          <a:ext cx="0" cy="0"/>
+          <a:chOff x="0" y="0"/>
+          <a:chExt cx="0" cy="0"/>
+        </a:xfrm>
+      </p:grpSpPr>
+      <p:pic>
+        <p:nvPicPr>
+          <p:cNvPr id="4" name="Espace réservé du contenu 3">
+            <a:extLst>
+              <a:ext uri="{FF2B5EF4-FFF2-40B4-BE49-F238E27FC236}">
+                <a16:creationId xmlns:a16="http://schemas.microsoft.com/office/drawing/2014/main" id="{7881A3DD-101F-4A4E-AB33-DDA8C3B25695}"/>
+              </a:ext>
+            </a:extLst>
+          </p:cNvPr>
+          <p:cNvPicPr>
+            <a:picLocks noGrp="1" noChangeAspect="1"/>
+          </p:cNvPicPr>
+          <p:nvPr>
+            <p:ph idx="1"/>
+          </p:nvPr>
+        </p:nvPicPr>
+        <p:blipFill>
+          <a:blip r:embed="rId2"/>
+          <a:stretch>
+            <a:fillRect/>
+          </a:stretch>
+        </p:blipFill>
+        <p:spPr>
+          <a:xfrm>
+            <a:off x="201579" y="1110483"/>
+            <a:ext cx="6492181" cy="5042515"/>
+          </a:xfrm>
+          <a:prstGeom prst="rect">
+            <a:avLst/>
+          </a:prstGeom>
+        </p:spPr>
+      </p:pic>
+      <p:cxnSp>
+        <p:nvCxnSpPr>
+          <p:cNvPr id="8" name="Connecteur droit 7">
+            <a:extLst>
+              <a:ext uri="{FF2B5EF4-FFF2-40B4-BE49-F238E27FC236}">
+                <a16:creationId xmlns:a16="http://schemas.microsoft.com/office/drawing/2014/main" id="{4B597A5B-B12A-4CAE-8FA3-63782F7F71C4}"/>
+              </a:ext>
+            </a:extLst>
+          </p:cNvPr>
+          <p:cNvCxnSpPr/>
+          <p:nvPr/>
+        </p:nvCxnSpPr>
+        <p:spPr>
+          <a:xfrm>
+            <a:off x="7182035" y="295182"/>
+            <a:ext cx="0" cy="6267635"/>
+          </a:xfrm>
+          <a:prstGeom prst="line">
+            <a:avLst/>
+          </a:prstGeom>
+        </p:spPr>
+        <p:style>
+          <a:lnRef idx="1">
+            <a:schemeClr val="accent1"/>
+          </a:lnRef>
+          <a:fillRef idx="0">
+            <a:schemeClr val="accent1"/>
+          </a:fillRef>
+          <a:effectRef idx="0">
+            <a:schemeClr val="accent1"/>
+          </a:effectRef>
+          <a:fontRef idx="minor">
+            <a:schemeClr val="tx1"/>
+          </a:fontRef>
+        </p:style>
+      </p:cxnSp>
+      <p:pic>
+        <p:nvPicPr>
+          <p:cNvPr id="9" name="Image 8">
+            <a:extLst>
+              <a:ext uri="{FF2B5EF4-FFF2-40B4-BE49-F238E27FC236}">
+                <a16:creationId xmlns:a16="http://schemas.microsoft.com/office/drawing/2014/main" id="{2C35CA4F-8591-44C0-AE01-9C702A698388}"/>
+              </a:ext>
+            </a:extLst>
+          </p:cNvPr>
+          <p:cNvPicPr>
+            <a:picLocks noChangeAspect="1"/>
+          </p:cNvPicPr>
+          <p:nvPr/>
+        </p:nvPicPr>
+        <p:blipFill>
+          <a:blip r:embed="rId3"/>
+          <a:stretch>
+            <a:fillRect/>
+          </a:stretch>
+        </p:blipFill>
+        <p:spPr>
+          <a:xfrm>
+            <a:off x="7702422" y="1110483"/>
+            <a:ext cx="4216583" cy="2360533"/>
+          </a:xfrm>
+          <a:prstGeom prst="rect">
+            <a:avLst/>
+          </a:prstGeom>
+        </p:spPr>
+      </p:pic>
+      <p:sp>
+        <p:nvSpPr>
+          <p:cNvPr id="10" name="ZoneTexte 9">
+            <a:extLst>
+              <a:ext uri="{FF2B5EF4-FFF2-40B4-BE49-F238E27FC236}">
+                <a16:creationId xmlns:a16="http://schemas.microsoft.com/office/drawing/2014/main" id="{6EE253A9-A77E-4C57-ABB3-431258B1ACA1}"/>
+              </a:ext>
+            </a:extLst>
+          </p:cNvPr>
+          <p:cNvSpPr txBox="1"/>
+          <p:nvPr/>
+        </p:nvSpPr>
+        <p:spPr>
+          <a:xfrm>
+            <a:off x="7702423" y="741151"/>
+            <a:ext cx="2290436" cy="369332"/>
+          </a:xfrm>
+          <a:prstGeom prst="rect">
+            <a:avLst/>
+          </a:prstGeom>
+          <a:noFill/>
+        </p:spPr>
+        <p:txBody>
+          <a:bodyPr wrap="square" rtlCol="0">
+            <a:spAutoFit/>
+          </a:bodyPr>
+          <a:lstStyle/>
+          <a:p>
+            <a:r>
+              <a:rPr lang="fr-FR" dirty="0"/>
+              <a:t>CSS PARENT :</a:t>
+            </a:r>
+          </a:p>
+        </p:txBody>
+      </p:sp>
+      <p:sp>
+        <p:nvSpPr>
+          <p:cNvPr id="11" name="ZoneTexte 10">
+            <a:extLst>
+              <a:ext uri="{FF2B5EF4-FFF2-40B4-BE49-F238E27FC236}">
+                <a16:creationId xmlns:a16="http://schemas.microsoft.com/office/drawing/2014/main" id="{24CE8606-4F17-4EA6-9FBA-B4EACBC0C48A}"/>
+              </a:ext>
+            </a:extLst>
+          </p:cNvPr>
+          <p:cNvSpPr txBox="1"/>
+          <p:nvPr/>
+        </p:nvSpPr>
+        <p:spPr>
+          <a:xfrm>
+            <a:off x="7702423" y="3573263"/>
+            <a:ext cx="2743135" cy="369332"/>
+          </a:xfrm>
+          <a:prstGeom prst="rect">
+            <a:avLst/>
+          </a:prstGeom>
+          <a:noFill/>
+        </p:spPr>
+        <p:txBody>
+          <a:bodyPr wrap="square" rtlCol="0">
+            <a:spAutoFit/>
+          </a:bodyPr>
+          <a:lstStyle/>
+          <a:p>
+            <a:r>
+              <a:rPr lang="fr-FR" dirty="0"/>
+              <a:t>HTML PARENT + ENFANTS :</a:t>
+            </a:r>
+          </a:p>
+        </p:txBody>
+      </p:sp>
+      <p:pic>
+        <p:nvPicPr>
+          <p:cNvPr id="13" name="Image 12">
+            <a:extLst>
+              <a:ext uri="{FF2B5EF4-FFF2-40B4-BE49-F238E27FC236}">
+                <a16:creationId xmlns:a16="http://schemas.microsoft.com/office/drawing/2014/main" id="{03DE6A2B-2DDA-4C86-AC48-28A8CBD5C1FC}"/>
+              </a:ext>
+            </a:extLst>
+          </p:cNvPr>
+          <p:cNvPicPr>
+            <a:picLocks noChangeAspect="1"/>
+          </p:cNvPicPr>
+          <p:nvPr/>
+        </p:nvPicPr>
+        <p:blipFill>
+          <a:blip r:embed="rId4"/>
+          <a:stretch>
+            <a:fillRect/>
+          </a:stretch>
+        </p:blipFill>
+        <p:spPr>
+          <a:xfrm>
+            <a:off x="7702423" y="4044842"/>
+            <a:ext cx="4216591" cy="2240550"/>
+          </a:xfrm>
+          <a:prstGeom prst="rect">
+            <a:avLst/>
+          </a:prstGeom>
+        </p:spPr>
+      </p:pic>
+    </p:spTree>
+    <p:extLst>
+      <p:ext uri="{BB962C8B-B14F-4D97-AF65-F5344CB8AC3E}">
+        <p14:creationId xmlns:p14="http://schemas.microsoft.com/office/powerpoint/2010/main" val="536054006"/>
+      </p:ext>
+    </p:extLst>
+  </p:cSld>
+  <p:clrMapOvr>
+    <a:masterClrMapping/>
+  </p:clrMapOvr>
+</p:sld>
+</file>
+
+<file path=ppt/slides/slide7.xml><?xml version="1.0" encoding="utf-8"?>
+<p:sld xmlns:a="http://schemas.openxmlformats.org/drawingml/2006/main" xmlns:r="http://schemas.openxmlformats.org/officeDocument/2006/relationships" xmlns:p="http://schemas.openxmlformats.org/presentationml/2006/main">
+  <p:cSld>
+    <p:spTree>
+      <p:nvGrpSpPr>
+        <p:cNvPr id="1" name=""/>
+        <p:cNvGrpSpPr/>
+        <p:nvPr/>
+      </p:nvGrpSpPr>
+      <p:grpSpPr>
+        <a:xfrm>
+          <a:off x="0" y="0"/>
+          <a:ext cx="0" cy="0"/>
+          <a:chOff x="0" y="0"/>
+          <a:chExt cx="0" cy="0"/>
+        </a:xfrm>
+      </p:grpSpPr>
+      <p:sp>
+        <p:nvSpPr>
+          <p:cNvPr id="2" name="Titre 1">
+            <a:extLst>
+              <a:ext uri="{FF2B5EF4-FFF2-40B4-BE49-F238E27FC236}">
+                <a16:creationId xmlns:a16="http://schemas.microsoft.com/office/drawing/2014/main" id="{E954B1A0-C9C7-4EB9-9061-63900A6897A9}"/>
+              </a:ext>
+            </a:extLst>
+          </p:cNvPr>
+          <p:cNvSpPr>
+            <a:spLocks noGrp="1"/>
+          </p:cNvSpPr>
+          <p:nvPr>
+            <p:ph type="title"/>
+          </p:nvPr>
+        </p:nvSpPr>
+        <p:spPr/>
+        <p:txBody>
+          <a:bodyPr/>
+          <a:lstStyle/>
+          <a:p>
+            <a:pPr algn="ctr"/>
+            <a:r>
+              <a:rPr lang="fr-FR" dirty="0"/>
+              <a:t>A vous ! :D</a:t>
+            </a:r>
+          </a:p>
+        </p:txBody>
+      </p:sp>
+      <p:pic>
+        <p:nvPicPr>
+          <p:cNvPr id="5" name="Espace réservé du contenu 4">
+            <a:extLst>
+              <a:ext uri="{FF2B5EF4-FFF2-40B4-BE49-F238E27FC236}">
+                <a16:creationId xmlns:a16="http://schemas.microsoft.com/office/drawing/2014/main" id="{C90ED212-8E25-4E4B-84A4-EBE0B7A11CDC}"/>
+              </a:ext>
+            </a:extLst>
+          </p:cNvPr>
+          <p:cNvPicPr>
+            <a:picLocks noGrp="1" noChangeAspect="1"/>
+          </p:cNvPicPr>
+          <p:nvPr>
+            <p:ph idx="1"/>
+          </p:nvPr>
+        </p:nvPicPr>
+        <p:blipFill>
+          <a:blip r:embed="rId2" cstate="print">
+            <a:extLst>
+              <a:ext uri="{28A0092B-C50C-407E-A947-70E740481C1C}">
+                <a14:useLocalDpi xmlns:a14="http://schemas.microsoft.com/office/drawing/2010/main" val="0"/>
+              </a:ext>
+            </a:extLst>
+          </a:blip>
+          <a:stretch>
+            <a:fillRect/>
+          </a:stretch>
+        </p:blipFill>
+        <p:spPr>
+          <a:xfrm>
+            <a:off x="4144169" y="2286000"/>
+            <a:ext cx="3810000" cy="3810000"/>
+          </a:xfrm>
+        </p:spPr>
+      </p:pic>
+    </p:spTree>
+    <p:extLst>
+      <p:ext uri="{BB962C8B-B14F-4D97-AF65-F5344CB8AC3E}">
+        <p14:creationId xmlns:p14="http://schemas.microsoft.com/office/powerpoint/2010/main" val="2598407021"/>
+      </p:ext>
+    </p:extLst>
+  </p:cSld>
+  <p:clrMapOvr>
+    <a:masterClrMapping/>
   </p:clrMapOvr>
 </p:sld>
 </file>
